--- a/decks/hist-russian-revolution/hist-russian-revolution_ch5_october-1917.pptx
+++ b/decks/hist-russian-revolution/hist-russian-revolution_ch5_october-1917.pptx
@@ -130,31 +130,31 @@
   <p:extLst>
     <p:ext uri="{521415D9-36F7-43E2-AB2F-B90AF26B5E84}">
       <p14:sectionLst xmlns:p14="http://schemas.microsoft.com/office/powerpoint/2010/main">
-        <p14:section name="Opening" id="{cad1de88-cc41-b9f4-53a9-ca5a15b7b03f}">
+        <p14:section name="Opening" id="{c3939725-b0ca-aa7e-518f-be98d7e383c8}">
           <p14:sldIdLst>
             <p14:sldId id="256"/>
           </p14:sldIdLst>
         </p14:section>
-        <p14:section name="Gate" id="{d326b80e-8afe-8fe2-720a-a610c6a992c5}">
+        <p14:section name="Gate" id="{e31d6f96-1bb5-2cdb-a887-45da8c5591d4}">
           <p14:sldIdLst>
             <p14:sldId id="257"/>
             <p14:sldId id="258"/>
             <p14:sldId id="259"/>
           </p14:sldIdLst>
         </p14:section>
-        <p14:section name="Pre-teach" id="{ca1c4cb2-ec61-3e3e-5b1c-1838f3372c4b}">
+        <p14:section name="Pre-teach" id="{f4b65850-67b5-1ecc-5e2a-f97f87cd5aef}">
           <p14:sldIdLst>
             <p14:sldId id="260"/>
             <p14:sldId id="261"/>
           </p14:sldIdLst>
         </p14:section>
-        <p14:section name="Read-along" id="{95ebccb8-66fb-0a39-f7e7-798555322230}">
+        <p14:section name="Read-along" id="{e5eac6f8-a95f-1577-769a-a74f25013132}">
           <p14:sldIdLst>
             <p14:sldId id="262"/>
             <p14:sldId id="263"/>
           </p14:sldIdLst>
         </p14:section>
-        <p14:section name="Teach" id="{c8cc0379-0752-c717-2d07-afca9a6dc9ef}">
+        <p14:section name="Teach" id="{d44102b3-80be-665f-cc34-5e65467a8dda}">
           <p14:sldIdLst>
             <p14:sldId id="264"/>
             <p14:sldId id="265"/>
@@ -165,7 +165,7 @@
             <p14:sldId id="270"/>
           </p14:sldIdLst>
         </p14:section>
-        <p14:section name="Routes" id="{df484eed-b0c7-1722-4f9a-56631dbf98f5}">
+        <p14:section name="Routes" id="{8c6163b8-ad17-b3d1-15d3-b549cd1776d0}">
           <p14:sldIdLst>
             <p14:sldId id="271"/>
             <p14:sldId id="272"/>
@@ -173,12 +173,12 @@
             <p14:sldId id="274"/>
           </p14:sldIdLst>
         </p14:section>
-        <p14:section name="Close" id="{63247506-4503-b18a-86dd-5de21196b9d1}">
+        <p14:section name="Close" id="{315a66ef-f8e5-2466-bcb5-d71601008656}">
           <p14:sldIdLst>
             <p14:sldId id="275"/>
           </p14:sldIdLst>
         </p14:section>
-        <p14:section name="Answers" id="{4d34948f-35a3-0f72-e1a6-13570bb308a6}">
+        <p14:section name="Answers" id="{9da8a64b-733f-1a05-e42e-764c47d0f573}">
           <p14:sldIdLst>
             <p14:sldId id="276"/>
             <p14:sldId id="277"/>
